--- a/dist/초4/영어/이해와상호작용/초4_영어_이해와상호작용_01_가족소개하기_학생용.pptx
+++ b/dist/초4/영어/이해와상호작용/초4_영어_이해와상호작용_01_가족소개하기_학생용.pptx
@@ -120,13 +120,13 @@
   <p:extLst>
     <p:ext uri="{521415D9-36F7-43E2-AB2F-B90AF26B5E84}">
       <p14:sectionLst xmlns:p14="http://schemas.microsoft.com/office/powerpoint/2010/main">
-        <p14:section name="도입" id="{8d36daf4-896c-cf36-ec38-d807c014ac35}">
+        <p14:section name="도입" id="{15c82c75-6e7a-ea8f-82b3-3c9cbed82c6c}">
           <p14:sldIdLst>
             <p14:sldId id="256"/>
             <p14:sldId id="257"/>
           </p14:sldIdLst>
         </p14:section>
-        <p14:section name="개념" id="{0fd0aba0-8f8f-1c52-ed66-a2a83eb74545}">
+        <p14:section name="개념" id="{ff28e8c1-e16b-7276-a838-a54dd5867d27}">
           <p14:sldIdLst>
             <p14:sldId id="258"/>
             <p14:sldId id="259"/>
@@ -134,7 +134,7 @@
             <p14:sldId id="262"/>
           </p14:sldIdLst>
         </p14:section>
-        <p14:section name="연습" id="{090002e6-752a-2a4d-670e-416d78f9b5f0}">
+        <p14:section name="연습" id="{a94c0a3d-642e-4f63-faf3-79e68a12385a}">
           <p14:sldIdLst>
             <p14:sldId id="260"/>
             <p14:sldId id="263"/>
@@ -142,24 +142,24 @@
             <p14:sldId id="265"/>
           </p14:sldIdLst>
         </p14:section>
-        <p14:section name="개념" id="{48924cd8-9e82-dc53-a184-97e8f7b867b3}">
+        <p14:section name="개념" id="{2227030d-964e-dcb8-ddbb-506cef54b02e}">
           <p14:sldIdLst/>
         </p14:section>
-        <p14:section name="연습" id="{0547560c-1b9f-3940-d794-c7cd732143df}">
+        <p14:section name="연습" id="{ef0a03e4-8e9c-a675-d825-753846406df5}">
           <p14:sldIdLst/>
         </p14:section>
-        <p14:section name="확인" id="{af27eab9-c786-3277-e644-0d00b749c608}">
+        <p14:section name="확인" id="{696cb3b4-2c69-f51f-c96f-677b84cee223}">
           <p14:sldIdLst>
             <p14:sldId id="266"/>
             <p14:sldId id="267"/>
           </p14:sldIdLst>
         </p14:section>
-        <p14:section name="정리" id="{f20c29ec-239f-693b-eb8c-a62d92dc6b2a}">
+        <p14:section name="정리" id="{5bab2148-5356-9101-4ba6-df8d4acf7364}">
           <p14:sldIdLst>
             <p14:sldId id="268"/>
           </p14:sldIdLst>
         </p14:section>
-        <p14:section name="보충" id="{ce0ebb38-682e-9dc7-e601-8b7a9598fe2c}">
+        <p14:section name="보충" id="{cccb3685-3d8a-28de-f8e9-8d8e0835e341}">
           <p14:sldIdLst>
             <p14:sldId id="269"/>
           </p14:sldIdLst>

--- a/dist/초4/영어/이해와상호작용/초4_영어_이해와상호작용_01_가족소개하기_학생용.pptx
+++ b/dist/초4/영어/이해와상호작용/초4_영어_이해와상호작용_01_가족소개하기_학생용.pptx
@@ -120,13 +120,13 @@
   <p:extLst>
     <p:ext uri="{521415D9-36F7-43E2-AB2F-B90AF26B5E84}">
       <p14:sectionLst xmlns:p14="http://schemas.microsoft.com/office/powerpoint/2010/main">
-        <p14:section name="도입" id="{15c82c75-6e7a-ea8f-82b3-3c9cbed82c6c}">
+        <p14:section name="도입" id="{378989ba-a2d9-6d08-9cd8-0ed54068a35c}">
           <p14:sldIdLst>
             <p14:sldId id="256"/>
             <p14:sldId id="257"/>
           </p14:sldIdLst>
         </p14:section>
-        <p14:section name="개념" id="{ff28e8c1-e16b-7276-a838-a54dd5867d27}">
+        <p14:section name="개념" id="{027c615b-ae35-e95a-b832-4d7a19260ab0}">
           <p14:sldIdLst>
             <p14:sldId id="258"/>
             <p14:sldId id="259"/>
@@ -134,7 +134,7 @@
             <p14:sldId id="262"/>
           </p14:sldIdLst>
         </p14:section>
-        <p14:section name="연습" id="{a94c0a3d-642e-4f63-faf3-79e68a12385a}">
+        <p14:section name="연습" id="{8308436e-d76a-562a-3093-8a1b5bbf9fbf}">
           <p14:sldIdLst>
             <p14:sldId id="260"/>
             <p14:sldId id="263"/>
@@ -142,24 +142,24 @@
             <p14:sldId id="265"/>
           </p14:sldIdLst>
         </p14:section>
-        <p14:section name="개념" id="{2227030d-964e-dcb8-ddbb-506cef54b02e}">
+        <p14:section name="개념" id="{ec3e22e1-aae2-1349-dc8a-2f6cde3ec637}">
           <p14:sldIdLst/>
         </p14:section>
-        <p14:section name="연습" id="{ef0a03e4-8e9c-a675-d825-753846406df5}">
+        <p14:section name="연습" id="{ca497fd5-b9e7-2380-b7b1-5e606abc6824}">
           <p14:sldIdLst/>
         </p14:section>
-        <p14:section name="확인" id="{696cb3b4-2c69-f51f-c96f-677b84cee223}">
+        <p14:section name="확인" id="{1b89707d-b182-e00a-79df-3bd8a17767e1}">
           <p14:sldIdLst>
             <p14:sldId id="266"/>
             <p14:sldId id="267"/>
           </p14:sldIdLst>
         </p14:section>
-        <p14:section name="정리" id="{5bab2148-5356-9101-4ba6-df8d4acf7364}">
+        <p14:section name="정리" id="{b4a0e952-8228-a5ec-8de4-3b1fadf8029e}">
           <p14:sldIdLst>
             <p14:sldId id="268"/>
           </p14:sldIdLst>
         </p14:section>
-        <p14:section name="보충" id="{cccb3685-3d8a-28de-f8e9-8d8e0835e341}">
+        <p14:section name="보충" id="{e83b965a-45dd-ff82-bbb5-38a8b3ae6caf}">
           <p14:sldIdLst>
             <p14:sldId id="269"/>
           </p14:sldIdLst>
